--- a/GroundTruth/DynamicDataLabelPlacement_GroundTruthA.pptx
+++ b/GroundTruth/DynamicDataLabelPlacement_GroundTruthA.pptx
@@ -124,65 +124,14 @@
 </file>
 
 <file path=ppt/charts/chart1.xml><?xml version="1.0" encoding="utf-8"?>
-<c:chartSpace xmlns:c="http://schemas.openxmlformats.org/drawingml/2006/chart" xmlns:a="http://schemas.openxmlformats.org/drawingml/2006/main" xmlns:r="http://schemas.openxmlformats.org/officeDocument/2006/relationships" xmlns:c16r2="http://schemas.microsoft.com/office/drawing/2015/06/chart">
+<c:chartSpace xmlns:c="http://schemas.openxmlformats.org/drawingml/2006/chart" xmlns:a="http://schemas.openxmlformats.org/drawingml/2006/main" xmlns:r="http://schemas.openxmlformats.org/officeDocument/2006/relationships">
   <c:date1904 val="0"/>
-  <c:lang val="en-US"/>
-  <c:roundedCorners val="1"/>
-  <mc:AlternateContent xmlns:mc="http://schemas.openxmlformats.org/markup-compatibility/2006">
-    <mc:Choice xmlns:c14="http://schemas.microsoft.com/office/drawing/2007/8/2/chart" Requires="c14">
-      <c14:style val="102"/>
-    </mc:Choice>
-    <mc:Fallback>
-      <c:style val="2"/>
-    </mc:Fallback>
-  </mc:AlternateContent>
   <c:chart>
     <c:autoTitleDeleted val="1"/>
-    <c:view3D>
-      <c:rotX val="15"/>
-      <c:rotY val="20"/>
-      <c:depthPercent val="100"/>
-      <c:rAngAx val="1"/>
-    </c:view3D>
-    <c:floor>
-      <c:thickness val="0"/>
-      <c:spPr>
-        <a:noFill/>
-        <a:ln>
-          <a:noFill/>
-        </a:ln>
-        <a:effectLst/>
-        <a:sp3d/>
-      </c:spPr>
-    </c:floor>
-    <c:sideWall>
-      <c:thickness val="0"/>
-      <c:spPr>
-        <a:noFill/>
-        <a:ln>
-          <a:noFill/>
-        </a:ln>
-        <a:effectLst/>
-        <a:sp3d/>
-      </c:spPr>
-    </c:sideWall>
-    <c:backWall>
-      <c:thickness val="0"/>
-      <c:spPr>
-        <a:noFill/>
-        <a:ln>
-          <a:noFill/>
-        </a:ln>
-        <a:effectLst/>
-        <a:sp3d/>
-      </c:spPr>
-    </c:backWall>
     <c:plotArea>
-      <c:layout/>
-      <c:bar3DChart>
+      <c:barChart>
         <c:barDir val="col"/>
         <c:grouping val="stacked"/>
-        <c:varyColors val="1"/>
         <c:ser>
           <c:idx val="0"/>
           <c:order val="0"/>
@@ -197,17 +146,6 @@
               </c:strCache>
             </c:strRef>
           </c:tx>
-          <c:spPr>
-            <a:solidFill>
-              <a:schemeClr val="accent1"/>
-            </a:solidFill>
-            <a:ln>
-              <a:noFill/>
-            </a:ln>
-            <a:effectLst/>
-            <a:sp3d/>
-          </c:spPr>
-          <c:invertIfNegative val="1"/>
           <c:cat>
             <c:strRef>
               <c:f>Sheet1!$A$2:$A$7</c:f>
@@ -261,11 +199,6 @@
               </c:numCache>
             </c:numRef>
           </c:val>
-          <c:extLst>
-            <c:ext xmlns:c16="http://schemas.microsoft.com/office/drawing/2014/chart" uri="{C3380CC4-5D6E-409C-BE32-E72D297353CC}">
-              <c16:uniqueId val="{00000000-7923-F94D-9E6D-059C8C34024B}"/>
-            </c:ext>
-          </c:extLst>
         </c:ser>
         <c:ser>
           <c:idx val="1"/>
@@ -281,17 +214,29 @@
               </c:strCache>
             </c:strRef>
           </c:tx>
-          <c:spPr>
-            <a:solidFill>
-              <a:schemeClr val="accent2"/>
-            </a:solidFill>
-            <a:ln>
-              <a:noFill/>
-            </a:ln>
-            <a:effectLst/>
-            <a:sp3d/>
-          </c:spPr>
-          <c:invertIfNegative val="1"/>
+          <c:dLbls>
+            <c:dLbl>
+              <c:idx val="5"/>
+              <c:delete val="1"/>
+            </c:dLbl>
+            <c:txPr>
+              <a:bodyPr/>
+              <a:lstStyle/>
+              <a:p>
+                <a:pPr>
+                  <a:defRPr sz="800"/>
+                </a:pPr>
+                <a:endParaRPr lang="en-US"/>
+              </a:p>
+            </c:txPr>
+            <c:dLblPos val="ctr"/>
+            <c:showLegendKey val="0"/>
+            <c:showVal val="1"/>
+            <c:showCatName val="0"/>
+            <c:showSerName val="0"/>
+            <c:showPercent val="0"/>
+            <c:showBubbleSize val="0"/>
+          </c:dLbls>
           <c:cat>
             <c:strRef>
               <c:f>Sheet1!$A$2:$A$7</c:f>
@@ -345,11 +290,6 @@
               </c:numCache>
             </c:numRef>
           </c:val>
-          <c:extLst>
-            <c:ext xmlns:c16="http://schemas.microsoft.com/office/drawing/2014/chart" uri="{C3380CC4-5D6E-409C-BE32-E72D297353CC}">
-              <c16:uniqueId val="{00000001-7923-F94D-9E6D-059C8C34024B}"/>
-            </c:ext>
-          </c:extLst>
         </c:ser>
         <c:ser>
           <c:idx val="2"/>
@@ -365,17 +305,37 @@
               </c:strCache>
             </c:strRef>
           </c:tx>
-          <c:spPr>
-            <a:solidFill>
-              <a:schemeClr val="accent3"/>
-            </a:solidFill>
-            <a:ln>
-              <a:noFill/>
-            </a:ln>
-            <a:effectLst/>
-            <a:sp3d/>
-          </c:spPr>
-          <c:invertIfNegative val="1"/>
+          <c:dLbls>
+            <c:dLbl>
+              <c:idx val="2"/>
+              <c:delete val="1"/>
+            </c:dLbl>
+            <c:dLbl>
+              <c:idx val="3"/>
+              <c:delete val="1"/>
+            </c:dLbl>
+            <c:dLbl>
+              <c:idx val="5"/>
+              <c:delete val="1"/>
+            </c:dLbl>
+            <c:txPr>
+              <a:bodyPr/>
+              <a:lstStyle/>
+              <a:p>
+                <a:pPr>
+                  <a:defRPr sz="800"/>
+                </a:pPr>
+                <a:endParaRPr lang="en-US"/>
+              </a:p>
+            </c:txPr>
+            <c:dLblPos val="ctr"/>
+            <c:showLegendKey val="0"/>
+            <c:showVal val="1"/>
+            <c:showCatName val="0"/>
+            <c:showSerName val="0"/>
+            <c:showPercent val="0"/>
+            <c:showBubbleSize val="0"/>
+          </c:dLbls>
           <c:cat>
             <c:strRef>
               <c:f>Sheet1!$A$2:$A$7</c:f>
@@ -429,11 +389,6 @@
               </c:numCache>
             </c:numRef>
           </c:val>
-          <c:extLst>
-            <c:ext xmlns:c16="http://schemas.microsoft.com/office/drawing/2014/chart" uri="{C3380CC4-5D6E-409C-BE32-E72D297353CC}">
-              <c16:uniqueId val="{00000002-7923-F94D-9E6D-059C8C34024B}"/>
-            </c:ext>
-          </c:extLst>
         </c:ser>
         <c:ser>
           <c:idx val="3"/>
@@ -449,17 +404,9 @@
               </c:strCache>
             </c:strRef>
           </c:tx>
-          <c:spPr>
-            <a:solidFill>
-              <a:schemeClr val="accent4"/>
-            </a:solidFill>
-            <a:ln>
-              <a:noFill/>
-            </a:ln>
-            <a:effectLst/>
-            <a:sp3d/>
-          </c:spPr>
-          <c:invertIfNegative val="1"/>
+          <c:dLbls>
+            <c:delete val="1"/>
+          </c:dLbls>
           <c:cat>
             <c:strRef>
               <c:f>Sheet1!$A$2:$A$7</c:f>
@@ -513,26 +460,32 @@
               </c:numCache>
             </c:numRef>
           </c:val>
-          <c:extLst>
-            <c:ext xmlns:c16="http://schemas.microsoft.com/office/drawing/2014/chart" uri="{C3380CC4-5D6E-409C-BE32-E72D297353CC}">
-              <c16:uniqueId val="{00000003-7923-F94D-9E6D-059C8C34024B}"/>
-            </c:ext>
-          </c:extLst>
         </c:ser>
         <c:dLbls>
+          <c:numFmt formatCode="0" sourceLinked="0"/>
+          <c:txPr>
+            <a:bodyPr/>
+            <a:lstStyle/>
+            <a:p>
+              <a:pPr>
+                <a:defRPr sz="800"/>
+              </a:pPr>
+              <a:endParaRPr lang="en-US"/>
+            </a:p>
+          </c:txPr>
+          <c:dLblPos val="ctr"/>
           <c:showLegendKey val="0"/>
-          <c:showVal val="0"/>
+          <c:showVal val="1"/>
           <c:showCatName val="0"/>
           <c:showSerName val="0"/>
           <c:showPercent val="0"/>
           <c:showBubbleSize val="0"/>
+          <c:showLeaderLines val="1"/>
         </c:dLbls>
-        <c:gapWidth val="150"/>
-        <c:shape val="box"/>
+        <c:overlap val="100"/>
         <c:axId val="-2068027336"/>
         <c:axId val="-2113994440"/>
-        <c:axId val="0"/>
-      </c:bar3DChart>
+      </c:barChart>
       <c:catAx>
         <c:axId val="-2068027336"/>
         <c:scaling>
@@ -540,37 +493,9 @@
         </c:scaling>
         <c:delete val="0"/>
         <c:axPos val="b"/>
-        <c:numFmt formatCode="General" sourceLinked="0"/>
         <c:majorTickMark val="out"/>
         <c:minorTickMark val="none"/>
         <c:tickLblPos val="nextTo"/>
-        <c:spPr>
-          <a:noFill/>
-          <a:ln>
-            <a:noFill/>
-          </a:ln>
-          <a:effectLst/>
-        </c:spPr>
-        <c:txPr>
-          <a:bodyPr rot="-60000000" spcFirstLastPara="1" vertOverflow="ellipsis" vert="horz" wrap="square" anchor="ctr" anchorCtr="1"/>
-          <a:lstStyle/>
-          <a:p>
-            <a:pPr>
-              <a:defRPr sz="1197" b="0" i="0" u="none" strike="noStrike" kern="1200" baseline="0">
-                <a:solidFill>
-                  <a:schemeClr val="tx1">
-                    <a:lumMod val="65000"/>
-                    <a:lumOff val="35000"/>
-                  </a:schemeClr>
-                </a:solidFill>
-                <a:latin typeface="+mn-lt"/>
-                <a:ea typeface="+mn-ea"/>
-                <a:cs typeface="+mn-cs"/>
-              </a:defRPr>
-            </a:pPr>
-            <a:endParaRPr lang="en-US"/>
-          </a:p>
-        </c:txPr>
         <c:crossAx val="-2113994440"/>
         <c:crosses val="autoZero"/>
         <c:auto val="1"/>
@@ -580,116 +505,29 @@
       </c:catAx>
       <c:valAx>
         <c:axId val="-2113994440"/>
-        <c:scaling>
-          <c:orientation val="minMax"/>
-        </c:scaling>
+        <c:scaling/>
         <c:delete val="0"/>
         <c:axPos val="l"/>
-        <c:majorGridlines>
-          <c:spPr>
-            <a:ln w="9525" cap="flat" cmpd="sng" algn="ctr">
-              <a:solidFill>
-                <a:schemeClr val="tx1">
-                  <a:lumMod val="15000"/>
-                  <a:lumOff val="85000"/>
-                </a:schemeClr>
-              </a:solidFill>
-              <a:round/>
-            </a:ln>
-            <a:effectLst/>
-          </c:spPr>
-        </c:majorGridlines>
-        <c:numFmt formatCode="General" sourceLinked="1"/>
+        <c:majorGridlines/>
         <c:majorTickMark val="out"/>
         <c:minorTickMark val="none"/>
         <c:tickLblPos val="nextTo"/>
-        <c:spPr>
-          <a:noFill/>
-          <a:ln>
-            <a:noFill/>
-          </a:ln>
-          <a:effectLst/>
-        </c:spPr>
-        <c:txPr>
-          <a:bodyPr rot="-60000000" spcFirstLastPara="1" vertOverflow="ellipsis" vert="horz" wrap="square" anchor="ctr" anchorCtr="1"/>
-          <a:lstStyle/>
-          <a:p>
-            <a:pPr>
-              <a:defRPr sz="1197" b="0" i="0" u="none" strike="noStrike" kern="1200" baseline="0">
-                <a:solidFill>
-                  <a:schemeClr val="tx1">
-                    <a:lumMod val="65000"/>
-                    <a:lumOff val="35000"/>
-                  </a:schemeClr>
-                </a:solidFill>
-                <a:latin typeface="+mn-lt"/>
-                <a:ea typeface="+mn-ea"/>
-                <a:cs typeface="+mn-cs"/>
-              </a:defRPr>
-            </a:pPr>
-            <a:endParaRPr lang="en-US"/>
-          </a:p>
-        </c:txPr>
         <c:crossAx val="-2068027336"/>
         <c:crosses val="autoZero"/>
-        <c:crossBetween val="between"/>
       </c:valAx>
-      <c:spPr>
-        <a:noFill/>
-        <a:ln>
-          <a:noFill/>
-        </a:ln>
-        <a:effectLst/>
-      </c:spPr>
     </c:plotArea>
     <c:legend>
-      <c:legendPos val="r"/>
+      <c:legendPos/>
       <c:overlay val="0"/>
-      <c:spPr>
-        <a:noFill/>
-        <a:ln>
-          <a:noFill/>
-        </a:ln>
-        <a:effectLst/>
-      </c:spPr>
-      <c:txPr>
-        <a:bodyPr rot="0" spcFirstLastPara="1" vertOverflow="ellipsis" vert="horz" wrap="square" anchor="ctr" anchorCtr="1"/>
-        <a:lstStyle/>
-        <a:p>
-          <a:pPr>
-            <a:defRPr sz="1197" b="0" i="0" u="none" strike="noStrike" kern="1200" baseline="0">
-              <a:solidFill>
-                <a:schemeClr val="tx1">
-                  <a:lumMod val="65000"/>
-                  <a:lumOff val="35000"/>
-                </a:schemeClr>
-              </a:solidFill>
-              <a:latin typeface="+mn-lt"/>
-              <a:ea typeface="+mn-ea"/>
-              <a:cs typeface="+mn-cs"/>
-            </a:defRPr>
-          </a:pPr>
-          <a:endParaRPr lang="en-US"/>
-        </a:p>
-      </c:txPr>
     </c:legend>
-    <c:plotVisOnly val="1"/>
     <c:dispBlanksAs val="gap"/>
-    <c:showDLblsOverMax val="1"/>
   </c:chart>
-  <c:spPr>
-    <a:noFill/>
-    <a:ln>
-      <a:noFill/>
-    </a:ln>
-    <a:effectLst/>
-  </c:spPr>
   <c:txPr>
     <a:bodyPr/>
     <a:lstStyle/>
     <a:p>
       <a:pPr>
-        <a:defRPr/>
+        <a:defRPr sz="1800"/>
       </a:pPr>
       <a:endParaRPr lang="en-US"/>
     </a:p>
